--- a/index/designs/y9-l8/l4-location-words/l4-location-words.pptx
+++ b/index/designs/y9-l8/l4-location-words/l4-location-words.pptx
@@ -4176,12 +4176,6 @@
               </a:rPr>
               <a:t>Teacher models one example live: </a:t>
             </a:r>
-            <a:pPr algn="l" indent="0" marL="0">
-              <a:lnSpc>
-                <a:spcPts val="1485"/>
-              </a:lnSpc>
-              <a:buNone/>
-            </a:pPr>
             <a:r>
               <a:rPr lang="en-US" sz="1100" b="1" dirty="0">
                 <a:solidFill>
@@ -4306,12 +4300,6 @@
               </a:rPr>
               <a:t>Individual writing (5 min): </a:t>
             </a:r>
-            <a:pPr algn="l" indent="0" marL="0">
-              <a:lnSpc>
-                <a:spcPts val="1485"/>
-              </a:lnSpc>
-              <a:buNone/>
-            </a:pPr>
             <a:r>
               <a:rPr lang="en-US" sz="1100" b="1" dirty="0">
                 <a:solidFill>
@@ -4323,12 +4311,6 @@
               </a:rPr>
               <a:t>5 sentences</a:t>
             </a:r>
-            <a:pPr algn="l" indent="0" marL="0">
-              <a:lnSpc>
-                <a:spcPts val="1485"/>
-              </a:lnSpc>
-              <a:buNone/>
-            </a:pPr>
             <a:r>
               <a:rPr lang="en-US" sz="1100" dirty="0">
                 <a:solidFill>
@@ -4453,12 +4435,6 @@
               </a:rPr>
               <a:t>Peer-check (2 min): swap books — neighbour </a:t>
             </a:r>
-            <a:pPr algn="l" indent="0" marL="0">
-              <a:lnSpc>
-                <a:spcPts val="1485"/>
-              </a:lnSpc>
-              <a:buNone/>
-            </a:pPr>
             <a:r>
               <a:rPr lang="en-US" sz="1100" b="1" dirty="0">
                 <a:solidFill>
@@ -4470,12 +4446,6 @@
               </a:rPr>
               <a:t>circles</a:t>
             </a:r>
-            <a:pPr algn="l" indent="0" marL="0">
-              <a:lnSpc>
-                <a:spcPts val="1485"/>
-              </a:lnSpc>
-              <a:buNone/>
-            </a:pPr>
             <a:r>
               <a:rPr lang="en-US" sz="1100" dirty="0">
                 <a:solidFill>
@@ -4600,12 +4570,6 @@
               </a:rPr>
               <a:t>Students </a:t>
             </a:r>
-            <a:pPr algn="l" indent="0" marL="0">
-              <a:lnSpc>
-                <a:spcPts val="1485"/>
-              </a:lnSpc>
-              <a:buNone/>
-            </a:pPr>
             <a:r>
               <a:rPr lang="en-US" sz="1100" b="1" dirty="0">
                 <a:solidFill>
@@ -4617,12 +4581,6 @@
               </a:rPr>
               <a:t>self-correct</a:t>
             </a:r>
-            <a:pPr algn="l" indent="0" marL="0">
-              <a:lnSpc>
-                <a:spcPts val="1485"/>
-              </a:lnSpc>
-              <a:buNone/>
-            </a:pPr>
             <a:r>
               <a:rPr lang="en-US" sz="1100" dirty="0">
                 <a:solidFill>
@@ -5113,9 +5071,6 @@
               </a:rPr>
               <a:t>我们学校的</a:t>
             </a:r>
-            <a:pPr algn="l" indent="0" marL="0">
-              <a:buNone/>
-            </a:pPr>
             <a:r>
               <a:rPr lang="en-US" sz="1500" b="1" dirty="0">
                 <a:solidFill>
@@ -5127,9 +5082,6 @@
               </a:rPr>
               <a:t>____</a:t>
             </a:r>
-            <a:pPr algn="l" indent="0" marL="0">
-              <a:buNone/>
-            </a:pPr>
             <a:r>
               <a:rPr lang="en-US" sz="1500" dirty="0">
                 <a:solidFill>
@@ -5141,9 +5093,6 @@
               </a:rPr>
               <a:t>在</a:t>
             </a:r>
-            <a:pPr algn="l" indent="0" marL="0">
-              <a:buNone/>
-            </a:pPr>
             <a:r>
               <a:rPr lang="en-US" sz="1500" b="1" dirty="0">
                 <a:solidFill>
@@ -5155,9 +5104,6 @@
               </a:rPr>
               <a:t>____</a:t>
             </a:r>
-            <a:pPr algn="l" indent="0" marL="0">
-              <a:buNone/>
-            </a:pPr>
             <a:r>
               <a:rPr lang="en-US" sz="1500" dirty="0">
                 <a:solidFill>
@@ -5169,9 +5115,6 @@
               </a:rPr>
               <a:t>的</a:t>
             </a:r>
-            <a:pPr algn="l" indent="0" marL="0">
-              <a:buNone/>
-            </a:pPr>
             <a:r>
               <a:rPr lang="en-US" sz="1500" b="1" dirty="0">
                 <a:solidFill>
@@ -5183,9 +5126,6 @@
               </a:rPr>
               <a:t>____</a:t>
             </a:r>
-            <a:pPr algn="l" indent="0" marL="0">
-              <a:buNone/>
-            </a:pPr>
             <a:r>
               <a:rPr lang="en-US" sz="1500" dirty="0">
                 <a:solidFill>
@@ -7515,12 +7455,6 @@
               </a:rPr>
               <a:t>Project one </a:t>
             </a:r>
-            <a:pPr algn="l" indent="0" marL="0">
-              <a:lnSpc>
-                <a:spcPts val="1350"/>
-              </a:lnSpc>
-              <a:buNone/>
-            </a:pPr>
             <a:r>
               <a:rPr lang="en-US" sz="1000" b="1" dirty="0">
                 <a:solidFill>
@@ -7532,12 +7466,6 @@
               </a:rPr>
               <a:t>new</a:t>
             </a:r>
-            <a:pPr algn="l" indent="0" marL="0">
-              <a:lnSpc>
-                <a:spcPts val="1350"/>
-              </a:lnSpc>
-              <a:buNone/>
-            </a:pPr>
             <a:r>
               <a:rPr lang="en-US" sz="1000" dirty="0">
                 <a:solidFill>
@@ -7662,12 +7590,6 @@
               </a:rPr>
               <a:t>Next team's student says the corrected sentence within </a:t>
             </a:r>
-            <a:pPr algn="l" indent="0" marL="0">
-              <a:lnSpc>
-                <a:spcPts val="1350"/>
-              </a:lnSpc>
-              <a:buNone/>
-            </a:pPr>
             <a:r>
               <a:rPr lang="en-US" sz="1000" b="1" dirty="0">
                 <a:solidFill>
@@ -7679,12 +7601,6 @@
               </a:rPr>
               <a:t>10 seconds</a:t>
             </a:r>
-            <a:pPr algn="l" indent="0" marL="0">
-              <a:lnSpc>
-                <a:spcPts val="1350"/>
-              </a:lnSpc>
-              <a:buNone/>
-            </a:pPr>
             <a:r>
               <a:rPr lang="en-US" sz="1000" dirty="0">
                 <a:solidFill>
@@ -7929,12 +7845,6 @@
               </a:rPr>
               <a:t>Teacher may repeat the sentence </a:t>
             </a:r>
-            <a:pPr algn="l" indent="0" marL="0">
-              <a:lnSpc>
-                <a:spcPts val="1400"/>
-              </a:lnSpc>
-              <a:buNone/>
-            </a:pPr>
             <a:r>
               <a:rPr lang="en-US" sz="1000" b="1" dirty="0">
                 <a:solidFill>
@@ -7946,12 +7856,6 @@
               </a:rPr>
               <a:t>once</a:t>
             </a:r>
-            <a:pPr algn="l" indent="0" marL="0">
-              <a:lnSpc>
-                <a:spcPts val="1400"/>
-              </a:lnSpc>
-              <a:buNone/>
-            </a:pPr>
             <a:r>
               <a:rPr lang="en-US" sz="1000" dirty="0">
                 <a:solidFill>
@@ -9583,9 +9487,6 @@
               </a:rPr>
               <a:t>Hold up fingers: </a:t>
             </a:r>
-            <a:pPr algn="l" indent="0" marL="0">
-              <a:buNone/>
-            </a:pPr>
             <a:r>
               <a:rPr lang="en-US" sz="1000" b="1" dirty="0">
                 <a:solidFill>
@@ -9597,9 +9498,6 @@
               </a:rPr>
               <a:t>3</a:t>
             </a:r>
-            <a:pPr algn="l" indent="0" marL="0">
-              <a:buNone/>
-            </a:pPr>
             <a:r>
               <a:rPr lang="en-US" sz="1000" dirty="0">
                 <a:solidFill>
@@ -9611,9 +9509,6 @@
               </a:rPr>
               <a:t> = 完全可以 · </a:t>
             </a:r>
-            <a:pPr algn="l" indent="0" marL="0">
-              <a:buNone/>
-            </a:pPr>
             <a:r>
               <a:rPr lang="en-US" sz="1000" b="1" dirty="0">
                 <a:solidFill>
@@ -9625,9 +9520,6 @@
               </a:rPr>
               <a:t>2</a:t>
             </a:r>
-            <a:pPr algn="l" indent="0" marL="0">
-              <a:buNone/>
-            </a:pPr>
             <a:r>
               <a:rPr lang="en-US" sz="1000" dirty="0">
                 <a:solidFill>
@@ -9639,9 +9531,6 @@
               </a:rPr>
               <a:t> = 差不多 · </a:t>
             </a:r>
-            <a:pPr algn="l" indent="0" marL="0">
-              <a:buNone/>
-            </a:pPr>
             <a:r>
               <a:rPr lang="en-US" sz="1000" b="1" dirty="0">
                 <a:solidFill>
@@ -9653,9 +9542,6 @@
               </a:rPr>
               <a:t>1</a:t>
             </a:r>
-            <a:pPr algn="l" indent="0" marL="0">
-              <a:buNone/>
-            </a:pPr>
             <a:r>
               <a:rPr lang="en-US" sz="1000" dirty="0">
                 <a:solidFill>
@@ -10543,9 +10429,6 @@
               </a:rPr>
               <a:t>Note:</a:t>
             </a:r>
-            <a:pPr algn="l" indent="0" marL="0">
-              <a:buNone/>
-            </a:pPr>
             <a:r>
               <a:rPr lang="en-US" sz="900" dirty="0">
                 <a:solidFill>
@@ -10766,9 +10649,6 @@
               </a:rPr>
               <a:t>我最喜欢的地方是</a:t>
             </a:r>
-            <a:pPr algn="l" indent="0" marL="0">
-              <a:buNone/>
-            </a:pPr>
             <a:r>
               <a:rPr lang="en-US" sz="1600" b="1" dirty="0">
                 <a:solidFill>
@@ -10780,9 +10660,6 @@
               </a:rPr>
               <a:t>____</a:t>
             </a:r>
-            <a:pPr algn="l" indent="0" marL="0">
-              <a:buNone/>
-            </a:pPr>
             <a:r>
               <a:rPr lang="en-US" sz="1600" dirty="0">
                 <a:solidFill>
@@ -10794,9 +10671,6 @@
               </a:rPr>
               <a:t>，它在</a:t>
             </a:r>
-            <a:pPr algn="l" indent="0" marL="0">
-              <a:buNone/>
-            </a:pPr>
             <a:r>
               <a:rPr lang="en-US" sz="1600" b="1" dirty="0">
                 <a:solidFill>
@@ -10808,9 +10682,6 @@
               </a:rPr>
               <a:t>____</a:t>
             </a:r>
-            <a:pPr algn="l" indent="0" marL="0">
-              <a:buNone/>
-            </a:pPr>
             <a:r>
               <a:rPr lang="en-US" sz="1600" dirty="0">
                 <a:solidFill>
@@ -10822,9 +10693,6 @@
               </a:rPr>
               <a:t>的</a:t>
             </a:r>
-            <a:pPr algn="l" indent="0" marL="0">
-              <a:buNone/>
-            </a:pPr>
             <a:r>
               <a:rPr lang="en-US" sz="1600" b="1" dirty="0">
                 <a:solidFill>
@@ -10836,9 +10704,6 @@
               </a:rPr>
               <a:t>____</a:t>
             </a:r>
-            <a:pPr algn="l" indent="0" marL="0">
-              <a:buNone/>
-            </a:pPr>
             <a:r>
               <a:rPr lang="en-US" sz="1600" dirty="0">
                 <a:solidFill>
@@ -10892,12 +10757,6 @@
               </a:rPr>
               <a:t>Write </a:t>
             </a:r>
-            <a:pPr algn="l" indent="0" marL="0">
-              <a:lnSpc>
-                <a:spcPts val="1450"/>
-              </a:lnSpc>
-              <a:buNone/>
-            </a:pPr>
             <a:r>
               <a:rPr lang="en-US" sz="1000" b="1" dirty="0">
                 <a:solidFill>
@@ -10909,12 +10768,6 @@
               </a:rPr>
               <a:t>ONE sentence</a:t>
             </a:r>
-            <a:pPr algn="l" indent="0" marL="0">
-              <a:lnSpc>
-                <a:spcPts val="1450"/>
-              </a:lnSpc>
-              <a:buNone/>
-            </a:pPr>
             <a:r>
               <a:rPr lang="en-US" sz="1000" dirty="0">
                 <a:solidFill>
@@ -11450,12 +11303,6 @@
               </a:rPr>
               <a:t>下一课，我们要学更多位置词——</a:t>
             </a:r>
-            <a:pPr algn="ctr" indent="0" marL="0">
-              <a:lnSpc>
-                <a:spcPts val="2250"/>
-              </a:lnSpc>
-              <a:buNone/>
-            </a:pPr>
             <a:r>
               <a:rPr lang="en-US" sz="1500" b="1" dirty="0">
                 <a:solidFill>
@@ -11467,12 +11314,6 @@
               </a:rPr>
               <a:t>上面、下面、前面、后面、对面、楼上、楼下</a:t>
             </a:r>
-            <a:pPr algn="ctr" indent="0" marL="0">
-              <a:lnSpc>
-                <a:spcPts val="2250"/>
-              </a:lnSpc>
-              <a:buNone/>
-            </a:pPr>
             <a:r>
               <a:rPr lang="en-US" sz="1500" dirty="0">
                 <a:solidFill>
@@ -12615,12 +12456,6 @@
               </a:rPr>
               <a:t>Project each word </a:t>
             </a:r>
-            <a:pPr algn="l" indent="0" marL="0">
-              <a:lnSpc>
-                <a:spcPts val="1595"/>
-              </a:lnSpc>
-              <a:buNone/>
-            </a:pPr>
             <a:r>
               <a:rPr lang="en-US" sz="1100" b="1" dirty="0">
                 <a:solidFill>
@@ -12632,12 +12467,6 @@
               </a:rPr>
               <a:t>one at a time</a:t>
             </a:r>
-            <a:pPr algn="l" indent="0" marL="0">
-              <a:lnSpc>
-                <a:spcPts val="1595"/>
-              </a:lnSpc>
-              <a:buNone/>
-            </a:pPr>
             <a:r>
               <a:rPr lang="en-US" sz="1100" dirty="0">
                 <a:solidFill>
@@ -12649,12 +12478,6 @@
               </a:rPr>
               <a:t> — class chorally names it in Chinese. Cold-call </a:t>
             </a:r>
-            <a:pPr algn="l" indent="0" marL="0">
-              <a:lnSpc>
-                <a:spcPts val="1595"/>
-              </a:lnSpc>
-              <a:buNone/>
-            </a:pPr>
             <a:r>
               <a:rPr lang="en-US" sz="1100" b="1" dirty="0">
                 <a:solidFill>
@@ -12666,12 +12489,6 @@
               </a:rPr>
               <a:t>one student per word</a:t>
             </a:r>
-            <a:pPr algn="l" indent="0" marL="0">
-              <a:lnSpc>
-                <a:spcPts val="1595"/>
-              </a:lnSpc>
-              <a:buNone/>
-            </a:pPr>
             <a:r>
               <a:rPr lang="en-US" sz="1100" dirty="0">
                 <a:solidFill>
@@ -12829,9 +12646,6 @@
               </a:rPr>
               <a:t>法语教室的</a:t>
             </a:r>
-            <a:pPr algn="l" indent="0" marL="0">
-              <a:buNone/>
-            </a:pPr>
             <a:r>
               <a:rPr lang="en-US" sz="1500" b="1" u="sng" dirty="0">
                 <a:solidFill>
@@ -12914,9 +12728,6 @@
               </a:rPr>
               <a:t>音乐室的</a:t>
             </a:r>
-            <a:pPr algn="l" indent="0" marL="0">
-              <a:buNone/>
-            </a:pPr>
             <a:r>
               <a:rPr lang="en-US" sz="1500" b="1" u="sng" dirty="0">
                 <a:solidFill>
@@ -12999,9 +12810,6 @@
               </a:rPr>
               <a:t>教师办公室和校医室的</a:t>
             </a:r>
-            <a:pPr algn="l" indent="0" marL="0">
-              <a:buNone/>
-            </a:pPr>
             <a:r>
               <a:rPr lang="en-US" sz="1500" b="1" u="sng" dirty="0">
                 <a:solidFill>
@@ -13084,9 +12892,6 @@
               </a:rPr>
               <a:t>男厕所在</a:t>
             </a:r>
-            <a:pPr algn="l" indent="0" marL="0">
-              <a:buNone/>
-            </a:pPr>
             <a:r>
               <a:rPr lang="en-US" sz="1500" b="1" u="sng" dirty="0">
                 <a:solidFill>
@@ -13098,9 +12903,6 @@
               </a:rPr>
               <a:t>左边</a:t>
             </a:r>
-            <a:pPr algn="l" indent="0" marL="0">
-              <a:buNone/>
-            </a:pPr>
             <a:r>
               <a:rPr lang="en-US" sz="1500" dirty="0">
                 <a:solidFill>
@@ -13112,9 +12914,6 @@
               </a:rPr>
               <a:t>，女厕所在</a:t>
             </a:r>
-            <a:pPr algn="l" indent="0" marL="0">
-              <a:buNone/>
-            </a:pPr>
             <a:r>
               <a:rPr lang="en-US" sz="1500" b="1" u="sng" dirty="0">
                 <a:solidFill>
@@ -13168,12 +12967,6 @@
               </a:rPr>
               <a:t>Redisplay the four Text 2 sentences students already met. Cold call students to </a:t>
             </a:r>
-            <a:pPr algn="l" indent="0" marL="0">
-              <a:lnSpc>
-                <a:spcPts val="1595"/>
-              </a:lnSpc>
-              <a:buNone/>
-            </a:pPr>
             <a:r>
               <a:rPr lang="en-US" sz="1100" b="1" dirty="0">
                 <a:solidFill>
@@ -13185,12 +12978,6 @@
               </a:rPr>
               <a:t>translate each highlighted word</a:t>
             </a:r>
-            <a:pPr algn="l" indent="0" marL="0">
-              <a:lnSpc>
-                <a:spcPts val="1595"/>
-              </a:lnSpc>
-              <a:buNone/>
-            </a:pPr>
             <a:r>
               <a:rPr lang="en-US" sz="1100" dirty="0">
                 <a:solidFill>
@@ -13297,12 +13084,6 @@
               </a:rPr>
               <a:t>"上节课我们在课文里看到了这些位置词，但是还没有自己练习用它们说句子。今天我们要专门练习——而且要小心一个很多同学会犯的</a:t>
             </a:r>
-            <a:pPr algn="l" indent="0" marL="0">
-              <a:lnSpc>
-                <a:spcPts val="1885"/>
-              </a:lnSpc>
-              <a:buNone/>
-            </a:pPr>
             <a:r>
               <a:rPr lang="en-US" sz="1300" b="1" dirty="0">
                 <a:solidFill>
@@ -13314,12 +13095,6 @@
               </a:rPr>
               <a:t>错误</a:t>
             </a:r>
-            <a:pPr algn="l" indent="0" marL="0">
-              <a:lnSpc>
-                <a:spcPts val="1885"/>
-              </a:lnSpc>
-              <a:buNone/>
-            </a:pPr>
             <a:r>
               <a:rPr lang="en-US" sz="1300" dirty="0">
                 <a:solidFill>
@@ -13804,12 +13579,6 @@
               </a:rPr>
               <a:t>We are learning to say where something is using </a:t>
             </a:r>
-            <a:pPr algn="l" indent="0" marL="0">
-              <a:lnSpc>
-                <a:spcPts val="2240"/>
-              </a:lnSpc>
-              <a:buNone/>
-            </a:pPr>
             <a:r>
               <a:rPr lang="en-US" sz="1600" b="1" dirty="0">
                 <a:solidFill>
@@ -13821,12 +13590,6 @@
               </a:rPr>
               <a:t>旁边、隔壁、中间、左边、右边</a:t>
             </a:r>
-            <a:pPr algn="l" indent="0" marL="0">
-              <a:lnSpc>
-                <a:spcPts val="2240"/>
-              </a:lnSpc>
-              <a:buNone/>
-            </a:pPr>
             <a:r>
               <a:rPr lang="en-US" sz="1600" dirty="0">
                 <a:solidFill>
@@ -13955,12 +13718,6 @@
               </a:rPr>
               <a:t>I can use </a:t>
             </a:r>
-            <a:pPr algn="l" indent="0" marL="0">
-              <a:lnSpc>
-                <a:spcPts val="1820"/>
-              </a:lnSpc>
-              <a:buNone/>
-            </a:pPr>
             <a:r>
               <a:rPr lang="en-US" sz="1300" b="1" dirty="0">
                 <a:solidFill>
@@ -13972,12 +13729,6 @@
               </a:rPr>
               <a:t>X 在 Y 的 + location word</a:t>
             </a:r>
-            <a:pPr algn="l" indent="0" marL="0">
-              <a:lnSpc>
-                <a:spcPts val="1820"/>
-              </a:lnSpc>
-              <a:buNone/>
-            </a:pPr>
             <a:r>
               <a:rPr lang="en-US" sz="1300" dirty="0">
                 <a:solidFill>
@@ -13990,12 +13741,6 @@
               <a:t> in the correct order
 </a:t>
             </a:r>
-            <a:pPr algn="l" indent="0" marL="0">
-              <a:lnSpc>
-                <a:spcPts val="1820"/>
-              </a:lnSpc>
-              <a:buNone/>
-            </a:pPr>
             <a:r>
               <a:rPr lang="en-US" sz="1200" b="1" dirty="0">
                 <a:solidFill>
@@ -14124,12 +13869,6 @@
               </a:rPr>
               <a:t>I can find and correct the </a:t>
             </a:r>
-            <a:pPr algn="l" indent="0" marL="0">
-              <a:lnSpc>
-                <a:spcPts val="1820"/>
-              </a:lnSpc>
-              <a:buNone/>
-            </a:pPr>
             <a:r>
               <a:rPr lang="en-US" sz="1300" b="1" dirty="0">
                 <a:solidFill>
@@ -14141,12 +13880,6 @@
               </a:rPr>
               <a:t>common word-order error</a:t>
             </a:r>
-            <a:pPr algn="l" indent="0" marL="0">
-              <a:lnSpc>
-                <a:spcPts val="1820"/>
-              </a:lnSpc>
-              <a:buNone/>
-            </a:pPr>
             <a:r>
               <a:rPr lang="en-US" sz="1300" dirty="0">
                 <a:solidFill>
@@ -14159,12 +13892,6 @@
               <a:t> with location words
 </a:t>
             </a:r>
-            <a:pPr algn="l" indent="0" marL="0">
-              <a:lnSpc>
-                <a:spcPts val="1820"/>
-              </a:lnSpc>
-              <a:buNone/>
-            </a:pPr>
             <a:r>
               <a:rPr lang="en-US" sz="1200" b="1" dirty="0">
                 <a:solidFill>
@@ -14293,12 +14020,6 @@
               </a:rPr>
               <a:t>I can describe where a room or facility is using a </a:t>
             </a:r>
-            <a:pPr algn="l" indent="0" marL="0">
-              <a:lnSpc>
-                <a:spcPts val="1820"/>
-              </a:lnSpc>
-              <a:buNone/>
-            </a:pPr>
             <a:r>
               <a:rPr lang="en-US" sz="1300" b="1" dirty="0">
                 <a:solidFill>
@@ -14310,12 +14031,6 @@
               </a:rPr>
               <a:t>complete sentence</a:t>
             </a:r>
-            <a:pPr algn="l" indent="0" marL="0">
-              <a:lnSpc>
-                <a:spcPts val="1820"/>
-              </a:lnSpc>
-              <a:buNone/>
-            </a:pPr>
             <a:r>
               <a:rPr lang="en-US" sz="1300" dirty="0">
                 <a:solidFill>
@@ -14328,12 +14043,6 @@
               <a:t>
 </a:t>
             </a:r>
-            <a:pPr algn="l" indent="0" marL="0">
-              <a:lnSpc>
-                <a:spcPts val="1820"/>
-              </a:lnSpc>
-              <a:buNone/>
-            </a:pPr>
             <a:r>
               <a:rPr lang="en-US" sz="1200" b="1" dirty="0">
                 <a:solidFill>
@@ -15637,9 +15346,6 @@
               </a:rPr>
               <a:t>✅ </a:t>
             </a:r>
-            <a:pPr algn="l" indent="0" marL="0">
-              <a:buNone/>
-            </a:pPr>
             <a:r>
               <a:rPr lang="en-US" sz="1200" b="1" dirty="0">
                 <a:solidFill>
@@ -15651,9 +15357,6 @@
               </a:rPr>
               <a:t>Already familiar from Lesson 3 &amp; Text 2</a:t>
             </a:r>
-            <a:pPr algn="l" indent="0" marL="0">
-              <a:buNone/>
-            </a:pPr>
             <a:r>
               <a:rPr lang="en-US" sz="1200" dirty="0">
                 <a:solidFill>
@@ -16135,9 +15838,6 @@
               </a:rPr>
               <a:t>X</a:t>
             </a:r>
-            <a:pPr algn="l" indent="0" marL="0">
-              <a:buNone/>
-            </a:pPr>
             <a:r>
               <a:rPr lang="en-US" sz="2600" dirty="0">
                 <a:solidFill>
@@ -16149,9 +15849,6 @@
               </a:rPr>
               <a:t> 在 </a:t>
             </a:r>
-            <a:pPr algn="l" indent="0" marL="0">
-              <a:buNone/>
-            </a:pPr>
             <a:r>
               <a:rPr lang="en-US" sz="2600" b="1" dirty="0">
                 <a:solidFill>
@@ -16163,9 +15860,6 @@
               </a:rPr>
               <a:t>Y</a:t>
             </a:r>
-            <a:pPr algn="l" indent="0" marL="0">
-              <a:buNone/>
-            </a:pPr>
             <a:r>
               <a:rPr lang="en-US" sz="2600" dirty="0">
                 <a:solidFill>
@@ -16333,9 +16027,6 @@
               </a:rPr>
               <a:t>汉语教室在法语教室的</a:t>
             </a:r>
-            <a:pPr algn="l" indent="0" marL="0">
-              <a:buNone/>
-            </a:pPr>
             <a:r>
               <a:rPr lang="en-US" sz="1700" b="1" dirty="0">
                 <a:solidFill>
@@ -16347,9 +16038,6 @@
               </a:rPr>
               <a:t>旁边</a:t>
             </a:r>
-            <a:pPr algn="l" indent="0" marL="0">
-              <a:buNone/>
-            </a:pPr>
             <a:r>
               <a:rPr lang="en-US" sz="1700" dirty="0">
                 <a:solidFill>
@@ -16478,9 +16166,6 @@
               </a:rPr>
               <a:t>物理实验室在音乐室的</a:t>
             </a:r>
-            <a:pPr algn="l" indent="0" marL="0">
-              <a:buNone/>
-            </a:pPr>
             <a:r>
               <a:rPr lang="en-US" sz="1700" b="1" dirty="0">
                 <a:solidFill>
@@ -16492,9 +16177,6 @@
               </a:rPr>
               <a:t>隔壁</a:t>
             </a:r>
-            <a:pPr algn="l" indent="0" marL="0">
-              <a:buNone/>
-            </a:pPr>
             <a:r>
               <a:rPr lang="en-US" sz="1700" dirty="0">
                 <a:solidFill>
@@ -16623,9 +16305,6 @@
               </a:rPr>
               <a:t>校长办公室在教师办公室和校医室的</a:t>
             </a:r>
-            <a:pPr algn="l" indent="0" marL="0">
-              <a:buNone/>
-            </a:pPr>
             <a:r>
               <a:rPr lang="en-US" sz="1700" b="1" dirty="0">
                 <a:solidFill>
@@ -16637,9 +16316,6 @@
               </a:rPr>
               <a:t>中间</a:t>
             </a:r>
-            <a:pPr algn="l" indent="0" marL="0">
-              <a:buNone/>
-            </a:pPr>
             <a:r>
               <a:rPr lang="en-US" sz="1700" dirty="0">
                 <a:solidFill>
@@ -16768,9 +16444,6 @@
               </a:rPr>
               <a:t>校长办公室在</a:t>
             </a:r>
-            <a:pPr algn="l" indent="0" marL="0">
-              <a:buNone/>
-            </a:pPr>
             <a:r>
               <a:rPr lang="en-US" sz="1700" b="1" dirty="0">
                 <a:solidFill>
@@ -16782,9 +16455,6 @@
               </a:rPr>
               <a:t>游泳池</a:t>
             </a:r>
-            <a:pPr algn="l" indent="0" marL="0">
-              <a:buNone/>
-            </a:pPr>
             <a:r>
               <a:rPr lang="en-US" sz="1700" dirty="0">
                 <a:solidFill>
@@ -16796,9 +16466,6 @@
               </a:rPr>
               <a:t>的</a:t>
             </a:r>
-            <a:pPr algn="l" indent="0" marL="0">
-              <a:buNone/>
-            </a:pPr>
             <a:r>
               <a:rPr lang="en-US" sz="1700" b="1" dirty="0">
                 <a:solidFill>
@@ -16810,9 +16477,6 @@
               </a:rPr>
               <a:t>旁边</a:t>
             </a:r>
-            <a:pPr algn="l" indent="0" marL="0">
-              <a:buNone/>
-            </a:pPr>
             <a:r>
               <a:rPr lang="en-US" sz="1700" dirty="0">
                 <a:solidFill>
@@ -18202,12 +17866,6 @@
               </a:rPr>
               <a:t>Project the ❌ / ✅ pair from the rule slide: </a:t>
             </a:r>
-            <a:pPr algn="l" indent="0" marL="0">
-              <a:lnSpc>
-                <a:spcPts val="1885"/>
-              </a:lnSpc>
-              <a:buNone/>
-            </a:pPr>
             <a:r>
               <a:rPr lang="en-US" sz="1300" b="1" dirty="0">
                 <a:solidFill>
@@ -18219,12 +17877,6 @@
               </a:rPr>
               <a:t>图书馆旁边在礼堂。</a:t>
             </a:r>
-            <a:pPr algn="l" indent="0" marL="0">
-              <a:lnSpc>
-                <a:spcPts val="1885"/>
-              </a:lnSpc>
-              <a:buNone/>
-            </a:pPr>
             <a:r>
               <a:rPr lang="en-US" sz="1100" dirty="0">
                 <a:solidFill>
@@ -18236,12 +17888,6 @@
               </a:rPr>
               <a:t> vs </a:t>
             </a:r>
-            <a:pPr algn="l" indent="0" marL="0">
-              <a:lnSpc>
-                <a:spcPts val="1885"/>
-              </a:lnSpc>
-              <a:buNone/>
-            </a:pPr>
             <a:r>
               <a:rPr lang="en-US" sz="1300" b="1" dirty="0">
                 <a:solidFill>
@@ -18253,12 +17899,6 @@
               </a:rPr>
               <a:t>图书馆在礼堂的旁边。</a:t>
             </a:r>
-            <a:pPr algn="l" indent="0" marL="0">
-              <a:lnSpc>
-                <a:spcPts val="1885"/>
-              </a:lnSpc>
-              <a:buNone/>
-            </a:pPr>
             <a:r>
               <a:rPr lang="en-US" sz="1100" dirty="0">
                 <a:solidFill>
@@ -18497,12 +18137,6 @@
               </a:rPr>
               <a:t>"Alex, 用'隔壁'说一句话，说说体育馆在哪儿。" Accept any grammatically correct sentence using </a:t>
             </a:r>
-            <a:pPr algn="l" indent="0" marL="0">
-              <a:lnSpc>
-                <a:spcPts val="1595"/>
-              </a:lnSpc>
-              <a:buNone/>
-            </a:pPr>
             <a:r>
               <a:rPr lang="en-US" sz="1100" b="1" dirty="0">
                 <a:solidFill>
@@ -18514,12 +18148,6 @@
               </a:rPr>
               <a:t>X 在 Y 的隔壁</a:t>
             </a:r>
-            <a:pPr algn="l" indent="0" marL="0">
-              <a:lnSpc>
-                <a:spcPts val="1595"/>
-              </a:lnSpc>
-              <a:buNone/>
-            </a:pPr>
             <a:r>
               <a:rPr lang="en-US" sz="1100" dirty="0">
                 <a:solidFill>
@@ -18758,12 +18386,6 @@
               </a:rPr>
               <a:t>Teacher projects: </a:t>
             </a:r>
-            <a:pPr algn="l" indent="0" marL="0">
-              <a:lnSpc>
-                <a:spcPts val="1885"/>
-              </a:lnSpc>
-              <a:buNone/>
-            </a:pPr>
             <a:r>
               <a:rPr lang="en-US" sz="1300" b="1" dirty="0">
                 <a:solidFill>
@@ -18775,12 +18397,6 @@
               </a:rPr>
               <a:t>餐厅左边在图书馆。</a:t>
             </a:r>
-            <a:pPr algn="l" indent="0" marL="0">
-              <a:lnSpc>
-                <a:spcPts val="1885"/>
-              </a:lnSpc>
-              <a:buNone/>
-            </a:pPr>
             <a:r>
               <a:rPr lang="en-US" sz="1100" dirty="0">
                 <a:solidFill>
@@ -18940,9 +18556,6 @@
               </a:rPr>
               <a:t>Teacher note:</a:t>
             </a:r>
-            <a:pPr algn="l" indent="0" marL="0">
-              <a:buNone/>
-            </a:pPr>
             <a:r>
               <a:rPr lang="en-US" sz="1100" dirty="0">
                 <a:solidFill>
@@ -19439,12 +19052,6 @@
               </a:rPr>
               <a:t>Choral Error Correction — spot the mistake in: </a:t>
             </a:r>
-            <a:pPr algn="l" indent="0" marL="0">
-              <a:spcAft>
-                <a:spcPts val="800"/>
-              </a:spcAft>
-              <a:buNone/>
-            </a:pPr>
             <a:r>
               <a:rPr lang="en-US" sz="1300" dirty="0">
                 <a:solidFill>
@@ -19531,9 +19138,6 @@
               </a:rPr>
               <a:t>✅ 餐厅</a:t>
             </a:r>
-            <a:pPr algn="l" indent="0" marL="0">
-              <a:buNone/>
-            </a:pPr>
             <a:r>
               <a:rPr lang="en-US" sz="2200" b="1" dirty="0">
                 <a:solidFill>
@@ -19545,9 +19149,6 @@
               </a:rPr>
               <a:t>在图书馆的左边</a:t>
             </a:r>
-            <a:pPr algn="l" indent="0" marL="0">
-              <a:buNone/>
-            </a:pPr>
             <a:r>
               <a:rPr lang="en-US" sz="2200" dirty="0">
                 <a:solidFill>
